--- a/gallery/renders/two_column_basic.pptx
+++ b/gallery/renders/two_column_basic.pptx
@@ -46,16 +46,22 @@
           <a:bodyPr wrap="square" lIns="0" rIns="0" tIns="0" bIns="0"/>
           <a:lstStyle/>
           <a:p>
-            <a:pPr algn="l"/>
+            <a:pPr algn="l">
+              <a:buNone/>
+            </a:pPr>
             <a:r>
               <a:rPr lang="en-US" sz="2200">
                 <a:latin typeface="Arial"/>
               </a:rPr>
               <a:t>Platform hardening</a:t>
             </a:r>
-          </a:p>
-          <a:p>
-            <a:pPr algn="l"/>
+            <a:r>
+              <a:rPr lang="en-US" sz="2200">
+                <a:latin typeface="Arial"/>
+              </a:rPr>
+              <a:t>
+</a:t>
+            </a:r>
             <a:r>
               <a:rPr lang="en-US" sz="2200">
                 <a:latin typeface="Arial"/>
@@ -85,16 +91,22 @@
           <a:bodyPr wrap="square" lIns="0" rIns="0" tIns="0" bIns="0"/>
           <a:lstStyle/>
           <a:p>
-            <a:pPr algn="l"/>
+            <a:pPr algn="l">
+              <a:buNone/>
+            </a:pPr>
             <a:r>
               <a:rPr lang="en-US" sz="2200">
                 <a:latin typeface="Arial"/>
               </a:rPr>
               <a:t>Launch checklist</a:t>
             </a:r>
-          </a:p>
-          <a:p>
-            <a:pPr algn="l"/>
+            <a:r>
+              <a:rPr lang="en-US" sz="2200">
+                <a:latin typeface="Arial"/>
+              </a:rPr>
+              <a:t>
+</a:t>
+            </a:r>
             <a:r>
               <a:rPr lang="en-US" sz="2200">
                 <a:latin typeface="Arial"/>
@@ -124,7 +136,9 @@
           <a:bodyPr wrap="square" lIns="0" rIns="0" tIns="0" bIns="0"/>
           <a:lstStyle/>
           <a:p>
-            <a:pPr algn="l"/>
+            <a:pPr algn="l">
+              <a:buNone/>
+            </a:pPr>
             <a:r>
               <a:rPr lang="en-US" sz="3600" b="1">
                 <a:latin typeface="Arial"/>

--- a/gallery/renders/two_column_basic.pptx
+++ b/gallery/renders/two_column_basic.pptx
@@ -35,7 +35,7 @@
         <p:spPr>
           <a:xfrm>
             <a:off x="910336" y="1806854"/>
-            <a:ext cx="5331968" cy="4952390"/>
+            <a:ext cx="5331968" cy="670560"/>
           </a:xfrm>
           <a:prstGeom prst="rect">
             <a:avLst/>
@@ -80,7 +80,7 @@
         <p:spPr>
           <a:xfrm>
             <a:off x="6762496" y="1806854"/>
-            <a:ext cx="5331968" cy="4952390"/>
+            <a:ext cx="5331968" cy="670560"/>
           </a:xfrm>
           <a:prstGeom prst="rect">
             <a:avLst/>
@@ -125,7 +125,7 @@
         <p:spPr>
           <a:xfrm>
             <a:off x="910336" y="460857"/>
-            <a:ext cx="11184128" cy="1046073"/>
+            <a:ext cx="11184128" cy="548640"/>
           </a:xfrm>
           <a:prstGeom prst="rect">
             <a:avLst/>
